--- a/dist/초5/사회·역사/국토와생활/초5_사회·역사_국토와생활_03_인구와도시_학생용.pptx
+++ b/dist/초5/사회·역사/국토와생활/초5_사회·역사_국토와생활_03_인구와도시_학생용.pptx
@@ -120,13 +120,13 @@
   <p:extLst>
     <p:ext uri="{521415D9-36F7-43E2-AB2F-B90AF26B5E84}">
       <p14:sectionLst xmlns:p14="http://schemas.microsoft.com/office/powerpoint/2010/main">
-        <p14:section name="도입" id="{5e655f8e-f522-1ff5-d2ca-08b50eb06579}">
+        <p14:section name="도입" id="{27f9199b-4339-88db-ab27-f5718b300788}">
           <p14:sldIdLst>
             <p14:sldId id="256"/>
             <p14:sldId id="257"/>
           </p14:sldIdLst>
         </p14:section>
-        <p14:section name="개념" id="{80727abb-dd6f-3049-63f8-2a37889bc1de}">
+        <p14:section name="개념" id="{375194e5-d13c-f237-ee87-15b6dec47b21}">
           <p14:sldIdLst>
             <p14:sldId id="258"/>
             <p14:sldId id="259"/>
@@ -134,7 +134,7 @@
             <p14:sldId id="263"/>
           </p14:sldIdLst>
         </p14:section>
-        <p14:section name="연습" id="{62ca6772-f83f-0d75-6d92-665e876b4de6}">
+        <p14:section name="연습" id="{1c843a29-1f98-94ca-f6a4-20d54f822d4c}">
           <p14:sldIdLst>
             <p14:sldId id="260"/>
             <p14:sldId id="261"/>
@@ -142,24 +142,24 @@
             <p14:sldId id="265"/>
           </p14:sldIdLst>
         </p14:section>
-        <p14:section name="개념" id="{74cbd821-7a4c-e4b8-7f63-430c5ea039be}">
+        <p14:section name="개념" id="{609b72d0-7845-fc8c-5f12-52f00e8f308d}">
           <p14:sldIdLst/>
         </p14:section>
-        <p14:section name="연습" id="{f28380cc-969e-706e-7e45-b9563969e2a9}">
+        <p14:section name="연습" id="{33f42d87-016b-dd16-743b-d7b85afa7742}">
           <p14:sldIdLst/>
         </p14:section>
-        <p14:section name="확인" id="{3a862555-9a0d-7589-7565-c5c58560c851}">
+        <p14:section name="확인" id="{c7c6c925-df79-8e09-edbf-fa6c05ed6199}">
           <p14:sldIdLst>
             <p14:sldId id="266"/>
             <p14:sldId id="267"/>
           </p14:sldIdLst>
         </p14:section>
-        <p14:section name="정리" id="{f9b19e66-d455-edc1-8d81-5ae7d9d5ce6a}">
+        <p14:section name="정리" id="{76aab094-92e9-c17a-06a6-7906f87821f2}">
           <p14:sldIdLst>
             <p14:sldId id="268"/>
           </p14:sldIdLst>
         </p14:section>
-        <p14:section name="보충" id="{66ea5840-cd08-981c-d97a-b9030162790e}">
+        <p14:section name="보충" id="{791f7bd2-0f70-98d8-fd4f-dfb4d470e9cf}">
           <p14:sldIdLst>
             <p14:sldId id="269"/>
           </p14:sldIdLst>
